--- a/submissions/initial-phases/C_Charter/ClassMic_C1_Three_Slides.pptx
+++ b/submissions/initial-phases/C_Charter/ClassMic_C1_Three_Slides.pptx
@@ -2,39 +2,39 @@
 <file path=ppt/presentation.xml><?xml version="1.0" encoding="utf-8"?>
 <p:presentation xmlns:p="http://schemas.openxmlformats.org/presentationml/2006/main" embedTrueTypeFonts="1" saveSubsetFonts="0">
   <p:sldMasterIdLst>
-    <p:sldMasterId xmlns:r="http://schemas.openxmlformats.org/officeDocument/2006/relationships" id="2147483648" r:id="Rf6059ea7748b469a"/>
+    <p:sldMasterId xmlns:r="http://schemas.openxmlformats.org/officeDocument/2006/relationships" id="2147483648" r:id="R503b684c589c43a0"/>
   </p:sldMasterIdLst>
   <p:notesMasterIdLst>
-    <p:notesMasterId xmlns:r="http://schemas.openxmlformats.org/officeDocument/2006/relationships" r:id="R385b547c5e164eb6"/>
+    <p:notesMasterId xmlns:r="http://schemas.openxmlformats.org/officeDocument/2006/relationships" r:id="Rebfa89fc8e094eb7"/>
   </p:notesMasterIdLst>
   <p:sldIdLst>
-    <p:sldId xmlns:r="http://schemas.openxmlformats.org/officeDocument/2006/relationships" id="256" r:id="R151633f472b84f00"/>
-    <p:sldId xmlns:r="http://schemas.openxmlformats.org/officeDocument/2006/relationships" id="257" r:id="R06c326e81b894872"/>
-    <p:sldId xmlns:r="http://schemas.openxmlformats.org/officeDocument/2006/relationships" id="258" r:id="R7b3a1ecdb7d14b18"/>
+    <p:sldId xmlns:r="http://schemas.openxmlformats.org/officeDocument/2006/relationships" id="256" r:id="R614619b7df9e4497"/>
+    <p:sldId xmlns:r="http://schemas.openxmlformats.org/officeDocument/2006/relationships" id="257" r:id="Rf55f5acaac5b4e5f"/>
+    <p:sldId xmlns:r="http://schemas.openxmlformats.org/officeDocument/2006/relationships" id="258" r:id="Rd80681c4616740ef"/>
   </p:sldIdLst>
   <p:sldSz cx="12192000" cy="6858000"/>
   <p:notesSz cx="6858000" cy="9144000"/>
   <p:embeddedFontLst>
     <p:embeddedFont>
       <p:font typeface="Inter"/>
-      <p:regular xmlns:r="http://schemas.openxmlformats.org/officeDocument/2006/relationships" r:id="R4ad3eddaaf634bf8"/>
-      <p:bold xmlns:r="http://schemas.openxmlformats.org/officeDocument/2006/relationships" r:id="Rfb6dbcbbbb24467a"/>
+      <p:regular xmlns:r="http://schemas.openxmlformats.org/officeDocument/2006/relationships" r:id="Rccda2cef48044518"/>
+      <p:bold xmlns:r="http://schemas.openxmlformats.org/officeDocument/2006/relationships" r:id="R21ac4814e3bb4a1e"/>
     </p:embeddedFont>
     <p:embeddedFont>
       <p:font typeface="Inter Medium"/>
-      <p:regular xmlns:r="http://schemas.openxmlformats.org/officeDocument/2006/relationships" r:id="Rc1d4a913adf04aef"/>
+      <p:regular xmlns:r="http://schemas.openxmlformats.org/officeDocument/2006/relationships" r:id="Ra4711824c48e483f"/>
     </p:embeddedFont>
     <p:embeddedFont>
       <p:font typeface="Inter SemiBold"/>
-      <p:regular xmlns:r="http://schemas.openxmlformats.org/officeDocument/2006/relationships" r:id="Rc605080948814841"/>
-      <p:bold xmlns:r="http://schemas.openxmlformats.org/officeDocument/2006/relationships" r:id="R69221902336842d5"/>
+      <p:regular xmlns:r="http://schemas.openxmlformats.org/officeDocument/2006/relationships" r:id="R8515374f98b94505"/>
+      <p:bold xmlns:r="http://schemas.openxmlformats.org/officeDocument/2006/relationships" r:id="R2734362e5eb84d4d"/>
     </p:embeddedFont>
     <p:embeddedFont>
       <p:font typeface="OpenAI Sans"/>
-      <p:regular xmlns:r="http://schemas.openxmlformats.org/officeDocument/2006/relationships" r:id="R17448bb8bbdc426b"/>
-      <p:bold xmlns:r="http://schemas.openxmlformats.org/officeDocument/2006/relationships" r:id="Rae05bd57148c4124"/>
-      <p:italic xmlns:r="http://schemas.openxmlformats.org/officeDocument/2006/relationships" r:id="R9ef15d9f12334a73"/>
-      <p:boldItalic xmlns:r="http://schemas.openxmlformats.org/officeDocument/2006/relationships" r:id="Rcb1eb794bcb54959"/>
+      <p:regular xmlns:r="http://schemas.openxmlformats.org/officeDocument/2006/relationships" r:id="Rd2d87befcf8c42e4"/>
+      <p:bold xmlns:r="http://schemas.openxmlformats.org/officeDocument/2006/relationships" r:id="R5e8d1ede7f464306"/>
+      <p:italic xmlns:r="http://schemas.openxmlformats.org/officeDocument/2006/relationships" r:id="Rb4c9c577e8254651"/>
+      <p:boldItalic xmlns:r="http://schemas.openxmlformats.org/officeDocument/2006/relationships" r:id="R30e7026ac5584b21"/>
     </p:embeddedFont>
   </p:embeddedFontLst>
 </p:presentation>
@@ -422,7 +422,7 @@
               <a:buNone/>
             </a:pPr>
             <a:r>
-              <a:t>The scope and performance figures are proposed acceptance targets. No test outcomes are asserted. Speaking activation includes the time from instructor approval until a ready speaker is audible.</a:t>
+              <a:t>Speaking activation is the time from instructor approval until a ready speaker is audible. Measure one-way audio delay separately, with a 95th-percentile target of 150 ms or less.</a:t>
             </a:r>
             <a:endParaRPr/>
           </a:p>
@@ -493,7 +493,7 @@
           <a:lstStyle xmlns:a="http://schemas.openxmlformats.org/drawingml/2006/main"/>
           <a:p xmlns:a="http://schemas.openxmlformats.org/drawingml/2006/main">
             <a:r>
-              <a:t>Two weekly sprints end on 2 October to leave the product report ready before 3 October at 00:00. Live classroom deployment requires separate authorization.</a:t>
+              <a:t>The second sprint ends on 2 October so the product report can be ready before 3 October at 00:00. Classroom deployment requires separate approval.</a:t>
             </a:r>
           </a:p>
         </p:txBody>
@@ -572,7 +572,7 @@
               <a:buNone/>
             </a:pPr>
             <a:r>
-              <a:t>The proposed allocation is 54 hours for Temiko Machavariani and 46 for Nurtore Arynuruly. The course instructor accepts assessed deliverables and reviews material changes.</a:t>
+              <a:t>The proposed effort split is 54 hours for Temiko Machavariani and 46 for Nurtore Arynuruly. The course instructor accepts assessed deliverables and reviews material scope and schedule changes.</a:t>
             </a:r>
             <a:endParaRPr/>
           </a:p>
@@ -739,7 +739,7 @@
     <p:bg>
       <p:bgPr>
         <a:blipFill xmlns:a="http://schemas.openxmlformats.org/drawingml/2006/main" rotWithShape="1">
-          <a:blip xmlns:r="http://schemas.openxmlformats.org/officeDocument/2006/relationships" r:embed="R43af469d3faa4730">
+          <a:blip xmlns:r="http://schemas.openxmlformats.org/officeDocument/2006/relationships" r:embed="R3b54e20648c24853">
             <a:lum/>
           </a:blip>
           <a:srcRect l="0" t="0" r="0" b="0"/>
@@ -2279,7 +2279,7 @@
     <p:bg>
       <p:bgPr>
         <a:blipFill xmlns:a="http://schemas.openxmlformats.org/drawingml/2006/main" rotWithShape="1">
-          <a:blip xmlns:r="http://schemas.openxmlformats.org/officeDocument/2006/relationships" r:embed="R55db56223f4242ef">
+          <a:blip xmlns:r="http://schemas.openxmlformats.org/officeDocument/2006/relationships" r:embed="R4990f2fd95f54e1f">
             <a:lum/>
           </a:blip>
           <a:srcRect l="0" t="0" r="0" b="0"/>
@@ -2523,16 +2523,16 @@
   </p:cSld>
   <p:clrMap bg1="lt1" tx1="dk1" bg2="lt2" tx2="dk2" accent1="accent1" accent2="accent2" accent3="accent3" accent4="accent4" accent5="accent5" accent6="accent6" hlink="hlink" folHlink="folHlink"/>
   <p:sldLayoutIdLst>
-    <p:sldLayoutId xmlns:r="http://schemas.openxmlformats.org/officeDocument/2006/relationships" id="2147483649" r:id="Ra5a5b875b474442f"/>
-    <p:sldLayoutId xmlns:r="http://schemas.openxmlformats.org/officeDocument/2006/relationships" id="2147483650" r:id="R0e56063baf924f4f"/>
-    <p:sldLayoutId xmlns:r="http://schemas.openxmlformats.org/officeDocument/2006/relationships" id="2147483651" r:id="Rd4000ddd22b14093"/>
-    <p:sldLayoutId xmlns:r="http://schemas.openxmlformats.org/officeDocument/2006/relationships" id="2147483652" r:id="R83b4c2193ec64c3e"/>
-    <p:sldLayoutId xmlns:r="http://schemas.openxmlformats.org/officeDocument/2006/relationships" id="2147483653" r:id="Rf645f100641f49d8"/>
-    <p:sldLayoutId xmlns:r="http://schemas.openxmlformats.org/officeDocument/2006/relationships" id="2147483654" r:id="Rac377d919c5d432d"/>
-    <p:sldLayoutId xmlns:r="http://schemas.openxmlformats.org/officeDocument/2006/relationships" id="2147483655" r:id="Rfc22bcf4d98b4966"/>
-    <p:sldLayoutId xmlns:r="http://schemas.openxmlformats.org/officeDocument/2006/relationships" id="2147483656" r:id="Ra430a843dc2b4675"/>
-    <p:sldLayoutId xmlns:r="http://schemas.openxmlformats.org/officeDocument/2006/relationships" id="2147483657" r:id="Ra0d57400e22e4dbf"/>
-    <p:sldLayoutId xmlns:r="http://schemas.openxmlformats.org/officeDocument/2006/relationships" id="2147483658" r:id="R4512123fa92e4893"/>
+    <p:sldLayoutId xmlns:r="http://schemas.openxmlformats.org/officeDocument/2006/relationships" id="2147483649" r:id="R021c8c61ace04b2b"/>
+    <p:sldLayoutId xmlns:r="http://schemas.openxmlformats.org/officeDocument/2006/relationships" id="2147483650" r:id="R206a53d2a3654fbd"/>
+    <p:sldLayoutId xmlns:r="http://schemas.openxmlformats.org/officeDocument/2006/relationships" id="2147483651" r:id="R3e204f3bc9134efc"/>
+    <p:sldLayoutId xmlns:r="http://schemas.openxmlformats.org/officeDocument/2006/relationships" id="2147483652" r:id="R2c0af024a31948de"/>
+    <p:sldLayoutId xmlns:r="http://schemas.openxmlformats.org/officeDocument/2006/relationships" id="2147483653" r:id="R59c0b814125a490f"/>
+    <p:sldLayoutId xmlns:r="http://schemas.openxmlformats.org/officeDocument/2006/relationships" id="2147483654" r:id="R7160cdbc017745f7"/>
+    <p:sldLayoutId xmlns:r="http://schemas.openxmlformats.org/officeDocument/2006/relationships" id="2147483655" r:id="R14d5cd45946342c1"/>
+    <p:sldLayoutId xmlns:r="http://schemas.openxmlformats.org/officeDocument/2006/relationships" id="2147483656" r:id="Rf32edc1035f447f3"/>
+    <p:sldLayoutId xmlns:r="http://schemas.openxmlformats.org/officeDocument/2006/relationships" id="2147483657" r:id="R85ce6425be0d4a0b"/>
+    <p:sldLayoutId xmlns:r="http://schemas.openxmlformats.org/officeDocument/2006/relationships" id="2147483658" r:id="R8112d5a244bd4a67"/>
   </p:sldLayoutIdLst>
   <p:hf hdr="0" dt="0"/>
   <p:txStyles>
@@ -3526,7 +3526,7 @@
                 <a:ea typeface="Helvetica Neue"/>
                 <a:cs typeface="Helvetica Neue"/>
               </a:rPr>
-              <a:t>Test student phones as instructor-controlled microphones through a limited prototype and controlled evaluation. Use the findings to assess a future pilot.</a:t>
+              <a:t>Test whether instructor-controlled phone microphones make classroom questions easier to hear. Use the results to assess a larger pilot.</a:t>
             </a:r>
           </a:p>
         </p:txBody>
@@ -3888,7 +3888,7 @@
                           <a:ea typeface="Helvetica Neue"/>
                           <a:cs typeface="Helvetica Neue"/>
                         </a:rPr>
-                        <a:t>Five stories and all Must checks</a:t>
+                        <a:t>Five stories and all required checks</a:t>
                       </a:r>
                       <a:endParaRPr sz="1400">
                         <a:solidFill>
@@ -4032,7 +4032,7 @@
                           <a:ea typeface="Helvetica Neue"/>
                           <a:cs typeface="Helvetica Neue"/>
                         </a:rPr>
-                        <a:t>O2  Practical workflow</a:t>
+                        <a:t>O2  Setup and speaking</a:t>
                       </a:r>
                       <a:endParaRPr sz="1400">
                         <a:solidFill>
@@ -4389,7 +4389,7 @@
                           <a:ea typeface="Helvetica Neue"/>
                           <a:cs typeface="Helvetica Neue"/>
                         </a:rPr>
-                        <a:t>Counts and sample limits</a:t>
+                        <a:t>Feedback counts</a:t>
                       </a:r>
                       <a:endParaRPr sz="1400">
                         <a:solidFill>
@@ -5234,7 +5234,7 @@
                 <a:ea typeface="Helvetica Neue"/>
                 <a:cs typeface="Helvetica Neue"/>
               </a:rPr>
-              <a:t>Explicit microphone permission, instructor approval and push to talk. Mute, disconnect and end must stop audio. Preserve an alternative speaking route.</a:t>
+              <a:t>Require microphone permission, instructor approval and push to talk. Mute, disconnect and end must stop audio. Keep a physical microphone or instructor repetition available.</a:t>
             </a:r>
             <a:endParaRPr sz="1800">
               <a:solidFill>
@@ -5629,23 +5629,7 @@
                 <a:ea typeface="Helvetica Neue"/>
                 <a:cs typeface="Helvetica Neue"/>
               </a:rPr>
-              <a:t>Two weekly construction sprints, after the planned review </a:t>
-            </a:r>
-            <a:r>
-              <a:rPr sz="1200">
-                <a:latin typeface="Helvetica Neue"/>
-                <a:ea typeface="Helvetica Neue"/>
-                <a:cs typeface="Helvetica Neue"/>
-              </a:rPr>
-              <a:t>on 18 September</a:t>
-            </a:r>
-            <a:r>
-              <a:rPr sz="1200">
-                <a:latin typeface="Helvetica Neue"/>
-                <a:ea typeface="Helvetica Neue"/>
-                <a:cs typeface="Helvetica Neue"/>
-              </a:rPr>
-              <a:t>.</a:t>
+              <a:t>Two weekly development sprints follow the proposed plan review on 18 September.</a:t>
             </a:r>
             <a:endParaRPr sz="1100"/>
           </a:p>
@@ -6427,7 +6411,7 @@
                 <a:ea typeface="Helvetica Neue"/>
                 <a:cs typeface="Helvetica Neue"/>
               </a:rPr>
-              <a:t>Feedback, delay, incompatible devices, unwanted transmission and limited time. Test early and retain a fallback.</a:t>
+              <a:t>Speaker feedback, delays, incompatible devices and unwanted transmission. Test early and keep a physical microphone or instructor repetition available.</a:t>
             </a:r>
           </a:p>
         </p:txBody>
@@ -7791,7 +7775,7 @@
                 <a:ea typeface="Helvetica Neue"/>
                 <a:cs typeface="Helvetica Neue"/>
               </a:rPr>
-              <a:t>The PM coordinates daily work. The instructor reviews material scope and schedule changes. No university spending authority is implied.</a:t>
+              <a:t>The project manager coordinates daily work. The instructor reviews material scope and schedule changes. The team cannot commit university funds.</a:t>
             </a:r>
           </a:p>
         </p:txBody>
@@ -7837,7 +7821,7 @@
                 <a:ea typeface="Helvetica Neue"/>
                 <a:cs typeface="Helvetica Neue"/>
               </a:rPr>
-              <a:t>No live deployment or paid commitment is authorized by this draft.</a:t>
+              <a:t>New spending and live classroom use require separate approval.</a:t>
             </a:r>
             <a:endParaRPr sz="1100"/>
           </a:p>
